--- a/仕様書/ゲームルール.pptx
+++ b/仕様書/ゲームルール.pptx
@@ -733,11 +733,11 @@
               <a:buChar char="•"/>
             </a:pPr>
             <a:r>
-              <a:rPr kumimoji="1" lang="ja-JP" altLang="en-US"/>
+              <a:rPr kumimoji="1" lang="ja-JP" altLang="en-US" dirty="0"/>
               <a:t>誰が親になるか</a:t>
             </a:r>
             <a:r>
-              <a:rPr lang="ja-JP" altLang="en-US"/>
+              <a:rPr lang="ja-JP" altLang="en-US" dirty="0"/>
               <a:t>はランダムで決まる</a:t>
             </a:r>
             <a:endParaRPr kumimoji="1" lang="ja-JP" altLang="en-US" dirty="0"/>

--- a/仕様書/ゲームルール.pptx
+++ b/仕様書/ゲームルール.pptx
@@ -117,12 +117,12 @@
   <pc:docChgLst>
     <pc:chgData name="黒沢　爽次" userId="fae486ef-0c84-45a4-a237-2d2b758b0e89" providerId="ADAL" clId="{FCC73A94-0200-4CBC-9B10-83CBE5D1FA7B}"/>
     <pc:docChg chg="undo custSel addSld modSld">
-      <pc:chgData name="黒沢　爽次" userId="fae486ef-0c84-45a4-a237-2d2b758b0e89" providerId="ADAL" clId="{FCC73A94-0200-4CBC-9B10-83CBE5D1FA7B}" dt="2026-06-02T03:05:02.027" v="393" actId="20577"/>
+      <pc:chgData name="黒沢　爽次" userId="fae486ef-0c84-45a4-a237-2d2b758b0e89" providerId="ADAL" clId="{FCC73A94-0200-4CBC-9B10-83CBE5D1FA7B}" dt="2026-06-04T02:28:51.009" v="869" actId="20577"/>
       <pc:docMkLst>
         <pc:docMk/>
       </pc:docMkLst>
       <pc:sldChg chg="addSp delSp modSp new mod">
-        <pc:chgData name="黒沢　爽次" userId="fae486ef-0c84-45a4-a237-2d2b758b0e89" providerId="ADAL" clId="{FCC73A94-0200-4CBC-9B10-83CBE5D1FA7B}" dt="2026-06-02T03:05:02.027" v="393" actId="20577"/>
+        <pc:chgData name="黒沢　爽次" userId="fae486ef-0c84-45a4-a237-2d2b758b0e89" providerId="ADAL" clId="{FCC73A94-0200-4CBC-9B10-83CBE5D1FA7B}" dt="2026-06-04T02:28:51.009" v="869" actId="20577"/>
         <pc:sldMkLst>
           <pc:docMk/>
           <pc:sldMk cId="4140877535" sldId="256"/>
@@ -136,7 +136,7 @@
           </ac:spMkLst>
         </pc:spChg>
         <pc:spChg chg="add mod">
-          <ac:chgData name="黒沢　爽次" userId="fae486ef-0c84-45a4-a237-2d2b758b0e89" providerId="ADAL" clId="{FCC73A94-0200-4CBC-9B10-83CBE5D1FA7B}" dt="2026-06-02T03:05:02.027" v="393" actId="20577"/>
+          <ac:chgData name="黒沢　爽次" userId="fae486ef-0c84-45a4-a237-2d2b758b0e89" providerId="ADAL" clId="{FCC73A94-0200-4CBC-9B10-83CBE5D1FA7B}" dt="2026-06-04T02:28:51.009" v="869" actId="20577"/>
           <ac:spMkLst>
             <pc:docMk/>
             <pc:sldMk cId="4140877535" sldId="256"/>
@@ -663,7 +663,7 @@
         <p:spPr>
           <a:xfrm>
             <a:off x="1389413" y="1377538"/>
-            <a:ext cx="9014006" cy="1477328"/>
+            <a:ext cx="9014006" cy="2862322"/>
           </a:xfrm>
           <a:prstGeom prst="rect">
             <a:avLst/>
@@ -682,7 +682,7 @@
             </a:pPr>
             <a:r>
               <a:rPr kumimoji="1" lang="ja-JP" altLang="en-US" dirty="0"/>
-              <a:t>親が勝利条件を達成→親の勝利</a:t>
+              <a:t>ランダムに決められた５つの勝利条件から親が一つ選ぶ</a:t>
             </a:r>
             <a:endParaRPr kumimoji="1" lang="en-US" altLang="ja-JP" dirty="0"/>
           </a:p>
@@ -693,7 +693,66 @@
             </a:pPr>
             <a:r>
               <a:rPr lang="ja-JP" altLang="en-US" dirty="0"/>
-              <a:t>親を撃破→子の勝利</a:t>
+              <a:t>５つの選択肢は子も見れる、どれを選んだかは見れない</a:t>
+            </a:r>
+            <a:endParaRPr kumimoji="1" lang="en-US" altLang="ja-JP" dirty="0"/>
+          </a:p>
+          <a:p>
+            <a:pPr marL="285750" indent="-285750">
+              <a:buFont typeface="Arial" panose="020B0604020202020204" pitchFamily="34" charset="0"/>
+              <a:buChar char="•"/>
+            </a:pPr>
+            <a:r>
+              <a:rPr kumimoji="1" lang="ja-JP" altLang="en-US" dirty="0"/>
+              <a:t>親が勝利条件を達成→親の勝利</a:t>
+            </a:r>
+            <a:endParaRPr kumimoji="1" lang="en-US" altLang="ja-JP" dirty="0"/>
+          </a:p>
+          <a:p>
+            <a:pPr marL="285750" indent="-285750">
+              <a:buFont typeface="Arial" panose="020B0604020202020204" pitchFamily="34" charset="0"/>
+              <a:buChar char="•"/>
+            </a:pPr>
+            <a:r>
+              <a:rPr lang="ja-JP" altLang="en-US"/>
+              <a:t>親が勝利条件を達成する前に撃破</a:t>
+            </a:r>
+            <a:r>
+              <a:rPr lang="ja-JP" altLang="en-US" dirty="0"/>
+              <a:t>→子の勝利</a:t>
+            </a:r>
+            <a:endParaRPr lang="en-US" altLang="ja-JP" dirty="0"/>
+          </a:p>
+          <a:p>
+            <a:pPr marL="285750" indent="-285750">
+              <a:buFont typeface="Arial" panose="020B0604020202020204" pitchFamily="34" charset="0"/>
+              <a:buChar char="•"/>
+            </a:pPr>
+            <a:r>
+              <a:rPr lang="ja-JP" altLang="en-US" dirty="0"/>
+              <a:t>子は何度倒されても復活できる、倒されるとスキルと必殺技のゲージは０になる</a:t>
+            </a:r>
+            <a:endParaRPr lang="en-US" altLang="ja-JP" dirty="0"/>
+          </a:p>
+          <a:p>
+            <a:pPr marL="285750" indent="-285750">
+              <a:buFont typeface="Arial" panose="020B0604020202020204" pitchFamily="34" charset="0"/>
+              <a:buChar char="•"/>
+            </a:pPr>
+            <a:r>
+              <a:rPr lang="ja-JP" altLang="en-US" dirty="0"/>
+              <a:t>時間経過でスキルゲージが溜まり、満タンになるとスキルが使える</a:t>
+            </a:r>
+            <a:endParaRPr lang="en-US" altLang="ja-JP" dirty="0"/>
+          </a:p>
+          <a:p>
+            <a:pPr marL="285750" indent="-285750">
+              <a:buFont typeface="Arial" panose="020B0604020202020204" pitchFamily="34" charset="0"/>
+              <a:buChar char="•"/>
+            </a:pPr>
+            <a:r>
+              <a:rPr lang="ja-JP" altLang="en-US" dirty="0"/>
+              <a:t>エリア内にランダムに生成されるアイテムを集めると必殺技が使える</a:t>
             </a:r>
             <a:endParaRPr lang="en-US" altLang="ja-JP" dirty="0"/>
           </a:p>

--- a/仕様書/ゲームルール.pptx
+++ b/仕様書/ゲームルール.pptx
@@ -117,12 +117,12 @@
   <pc:docChgLst>
     <pc:chgData name="黒沢　爽次" userId="fae486ef-0c84-45a4-a237-2d2b758b0e89" providerId="ADAL" clId="{FCC73A94-0200-4CBC-9B10-83CBE5D1FA7B}"/>
     <pc:docChg chg="undo custSel addSld modSld">
-      <pc:chgData name="黒沢　爽次" userId="fae486ef-0c84-45a4-a237-2d2b758b0e89" providerId="ADAL" clId="{FCC73A94-0200-4CBC-9B10-83CBE5D1FA7B}" dt="2026-06-04T02:28:51.009" v="869" actId="20577"/>
+      <pc:chgData name="黒沢　爽次" userId="fae486ef-0c84-45a4-a237-2d2b758b0e89" providerId="ADAL" clId="{FCC73A94-0200-4CBC-9B10-83CBE5D1FA7B}" dt="2026-06-04T02:38:38.447" v="1121" actId="20577"/>
       <pc:docMkLst>
         <pc:docMk/>
       </pc:docMkLst>
       <pc:sldChg chg="addSp delSp modSp new mod">
-        <pc:chgData name="黒沢　爽次" userId="fae486ef-0c84-45a4-a237-2d2b758b0e89" providerId="ADAL" clId="{FCC73A94-0200-4CBC-9B10-83CBE5D1FA7B}" dt="2026-06-04T02:28:51.009" v="869" actId="20577"/>
+        <pc:chgData name="黒沢　爽次" userId="fae486ef-0c84-45a4-a237-2d2b758b0e89" providerId="ADAL" clId="{FCC73A94-0200-4CBC-9B10-83CBE5D1FA7B}" dt="2026-06-04T02:38:38.447" v="1121" actId="20577"/>
         <pc:sldMkLst>
           <pc:docMk/>
           <pc:sldMk cId="4140877535" sldId="256"/>
@@ -136,7 +136,7 @@
           </ac:spMkLst>
         </pc:spChg>
         <pc:spChg chg="add mod">
-          <ac:chgData name="黒沢　爽次" userId="fae486ef-0c84-45a4-a237-2d2b758b0e89" providerId="ADAL" clId="{FCC73A94-0200-4CBC-9B10-83CBE5D1FA7B}" dt="2026-06-04T02:28:51.009" v="869" actId="20577"/>
+          <ac:chgData name="黒沢　爽次" userId="fae486ef-0c84-45a4-a237-2d2b758b0e89" providerId="ADAL" clId="{FCC73A94-0200-4CBC-9B10-83CBE5D1FA7B}" dt="2026-06-04T02:38:38.447" v="1121" actId="20577"/>
           <ac:spMkLst>
             <pc:docMk/>
             <pc:sldMk cId="4140877535" sldId="256"/>
@@ -663,7 +663,7 @@
         <p:spPr>
           <a:xfrm>
             <a:off x="1389413" y="1377538"/>
-            <a:ext cx="9014006" cy="2862322"/>
+            <a:ext cx="10399001" cy="2862322"/>
           </a:xfrm>
           <a:prstGeom prst="rect">
             <a:avLst/>
@@ -714,12 +714,8 @@
               <a:buChar char="•"/>
             </a:pPr>
             <a:r>
-              <a:rPr lang="ja-JP" altLang="en-US"/>
-              <a:t>親が勝利条件を達成する前に撃破</a:t>
-            </a:r>
-            <a:r>
               <a:rPr lang="ja-JP" altLang="en-US" dirty="0"/>
-              <a:t>→子の勝利</a:t>
+              <a:t>親が勝利条件を達成する前に撃破→子の勝利</a:t>
             </a:r>
             <a:endParaRPr lang="en-US" altLang="ja-JP" dirty="0"/>
           </a:p>
@@ -762,10 +758,10 @@
               <a:buChar char="•"/>
             </a:pPr>
             <a:r>
-              <a:rPr kumimoji="1" lang="ja-JP" altLang="en-US" dirty="0"/>
-              <a:t>時間制限はなし、一定時間が経つとサドンデスモードに突入</a:t>
-            </a:r>
-            <a:endParaRPr kumimoji="1" lang="en-US" altLang="ja-JP" dirty="0"/>
+              <a:rPr lang="ja-JP" altLang="en-US" dirty="0"/>
+              <a:t>制限時間あり</a:t>
+            </a:r>
+            <a:endParaRPr lang="en-US" altLang="ja-JP" dirty="0"/>
           </a:p>
           <a:p>
             <a:pPr marL="285750" indent="-285750">
@@ -773,18 +769,10 @@
               <a:buChar char="•"/>
             </a:pPr>
             <a:r>
-              <a:rPr lang="ja-JP" altLang="en-US" dirty="0"/>
-              <a:t>サドンデスモード</a:t>
-            </a:r>
-            <a:r>
-              <a:rPr lang="en-US" altLang="ja-JP" dirty="0"/>
-              <a:t>…</a:t>
-            </a:r>
-            <a:r>
-              <a:rPr lang="ja-JP" altLang="en-US" dirty="0"/>
-              <a:t>攻撃によるダメージが２倍、３倍と時間経過とともに多くなる</a:t>
-            </a:r>
-            <a:endParaRPr lang="en-US" altLang="ja-JP" dirty="0"/>
+              <a:rPr kumimoji="1" lang="ja-JP" altLang="en-US" dirty="0"/>
+              <a:t>制限時間内に決着しなかった場合、勝利条件の進捗率と親の体力の割合を比較して勝敗を決める</a:t>
+            </a:r>
+            <a:endParaRPr kumimoji="1" lang="en-US" altLang="ja-JP" dirty="0"/>
           </a:p>
           <a:p>
             <a:pPr marL="285750" indent="-285750">

--- a/仕様書/ゲームルール.pptx
+++ b/仕様書/ゲームルール.pptx
@@ -117,12 +117,12 @@
   <pc:docChgLst>
     <pc:chgData name="黒沢　爽次" userId="fae486ef-0c84-45a4-a237-2d2b758b0e89" providerId="ADAL" clId="{FCC73A94-0200-4CBC-9B10-83CBE5D1FA7B}"/>
     <pc:docChg chg="undo custSel addSld modSld">
-      <pc:chgData name="黒沢　爽次" userId="fae486ef-0c84-45a4-a237-2d2b758b0e89" providerId="ADAL" clId="{FCC73A94-0200-4CBC-9B10-83CBE5D1FA7B}" dt="2026-06-04T02:38:38.447" v="1121" actId="20577"/>
+      <pc:chgData name="黒沢　爽次" userId="fae486ef-0c84-45a4-a237-2d2b758b0e89" providerId="ADAL" clId="{FCC73A94-0200-4CBC-9B10-83CBE5D1FA7B}" dt="2026-06-04T03:00:07.012" v="1153" actId="20577"/>
       <pc:docMkLst>
         <pc:docMk/>
       </pc:docMkLst>
       <pc:sldChg chg="addSp delSp modSp new mod">
-        <pc:chgData name="黒沢　爽次" userId="fae486ef-0c84-45a4-a237-2d2b758b0e89" providerId="ADAL" clId="{FCC73A94-0200-4CBC-9B10-83CBE5D1FA7B}" dt="2026-06-04T02:38:38.447" v="1121" actId="20577"/>
+        <pc:chgData name="黒沢　爽次" userId="fae486ef-0c84-45a4-a237-2d2b758b0e89" providerId="ADAL" clId="{FCC73A94-0200-4CBC-9B10-83CBE5D1FA7B}" dt="2026-06-04T03:00:07.012" v="1153" actId="20577"/>
         <pc:sldMkLst>
           <pc:docMk/>
           <pc:sldMk cId="4140877535" sldId="256"/>
@@ -136,7 +136,7 @@
           </ac:spMkLst>
         </pc:spChg>
         <pc:spChg chg="add mod">
-          <ac:chgData name="黒沢　爽次" userId="fae486ef-0c84-45a4-a237-2d2b758b0e89" providerId="ADAL" clId="{FCC73A94-0200-4CBC-9B10-83CBE5D1FA7B}" dt="2026-06-04T02:38:38.447" v="1121" actId="20577"/>
+          <ac:chgData name="黒沢　爽次" userId="fae486ef-0c84-45a4-a237-2d2b758b0e89" providerId="ADAL" clId="{FCC73A94-0200-4CBC-9B10-83CBE5D1FA7B}" dt="2026-06-04T03:00:07.012" v="1153" actId="20577"/>
           <ac:spMkLst>
             <pc:docMk/>
             <pc:sldMk cId="4140877535" sldId="256"/>
@@ -781,13 +781,8 @@
             </a:pPr>
             <a:r>
               <a:rPr kumimoji="1" lang="ja-JP" altLang="en-US" dirty="0"/>
-              <a:t>誰が親になるか</a:t>
-            </a:r>
-            <a:r>
-              <a:rPr lang="ja-JP" altLang="en-US" dirty="0"/>
-              <a:t>はランダムで決まる</a:t>
-            </a:r>
-            <a:endParaRPr kumimoji="1" lang="ja-JP" altLang="en-US" dirty="0"/>
+              <a:t>誰が親になるかは選べる</a:t>
+            </a:r>
           </a:p>
         </p:txBody>
       </p:sp>
